--- a/bitemp_register_v06/docs/presentaties/apidays/FOST & apidays Amsterdam 2026 - Volledige Recap 17p - NIEUW.pptx
+++ b/bitemp_register_v06/docs/presentaties/apidays/FOST & apidays Amsterdam 2026 - Volledige Recap 17p - NIEUW.pptx
@@ -12938,7 +12938,11 @@
               <a:buNone/>
             </a:pPr>
             <a:r>
-              <a:rPr lang="nl-NL" b="1"/>
+              <a:rPr lang="nl-NL" b="1">
+                <a:solidFill>
+                  <a:srgbClr val="DAFFDE"/>
+                </a:solidFill>
+              </a:rPr>
               <a:t>Jens Neuse (WunderGraph) ontmaskert dogma's:</a:t>
             </a:r>
           </a:p>
@@ -12972,7 +12976,11 @@
               </a:lnSpc>
             </a:pPr>
             <a:r>
-              <a:rPr lang="nl-NL" b="1"/>
+              <a:rPr lang="nl-NL" b="1">
+                <a:solidFill>
+                  <a:srgbClr val="DAFFDE"/>
+                </a:solidFill>
+              </a:rPr>
               <a:t>→ De caching-mythe: GraphQL is volwassen geworden. De bewering "GraphQL breekt caching" klopt niet meer.</a:t>
             </a:r>
           </a:p>
@@ -13006,7 +13014,11 @@
               </a:lnSpc>
             </a:pPr>
             <a:r>
-              <a:rPr lang="nl-NL" b="1"/>
+              <a:rPr lang="nl-NL" b="1">
+                <a:solidFill>
+                  <a:srgbClr val="DAFFDE"/>
+                </a:solidFill>
+              </a:rPr>
               <a:t>→ Gelaagde aanpak: Caching vereist een gecoördineerde stack (Client, CDN, Gateway en Applicatie-niveau).</a:t>
             </a:r>
           </a:p>
@@ -13040,7 +13052,11 @@
               </a:lnSpc>
             </a:pPr>
             <a:r>
-              <a:rPr lang="nl-NL" b="1"/>
+              <a:rPr lang="nl-NL" b="1">
+                <a:solidFill>
+                  <a:srgbClr val="DAFFDE"/>
+                </a:solidFill>
+              </a:rPr>
               <a:t>→ Abstraction Layer: GraphQL blinkt uit als één simplistische interface voor AI-modellen en agents, i.p.v. honderden REST-endpoints.</a:t>
             </a:r>
           </a:p>
@@ -13122,7 +13138,7 @@
             <a:r>
               <a:rPr lang="en-US" sz="2850" b="1" i="0" u="none" strike="noStrike" cap="none">
                 <a:solidFill>
-                  <a:srgbClr val="DEFF9A"/>
+                  <a:srgbClr val="F5F5F5"/>
                 </a:solidFill>
                 <a:latin typeface="Urbanist"/>
                 <a:ea typeface="Urbanist"/>
@@ -13260,7 +13276,11 @@
               <a:buNone/>
             </a:pPr>
             <a:r>
-              <a:rPr lang="nl-NL" b="1"/>
+              <a:rPr lang="nl-NL" b="1">
+                <a:solidFill>
+                  <a:srgbClr val="DAFFDE"/>
+                </a:solidFill>
+              </a:rPr>
               <a:t>De transitie in moderne API Governance:</a:t>
             </a:r>
           </a:p>
@@ -13294,7 +13314,11 @@
               </a:lnSpc>
             </a:pPr>
             <a:r>
-              <a:rPr lang="nl-NL" b="1"/>
+              <a:rPr lang="nl-NL" b="1">
+                <a:solidFill>
+                  <a:srgbClr val="DAFFDE"/>
+                </a:solidFill>
+              </a:rPr>
               <a:t>→ De chaos: Traditionele governance probeert complexe interacties tussen mensen / teams en API’s handmatig te reguleren.</a:t>
             </a:r>
           </a:p>
@@ -13328,7 +13352,11 @@
               </a:lnSpc>
             </a:pPr>
             <a:r>
-              <a:rPr lang="nl-NL" b="1"/>
+              <a:rPr lang="nl-NL" b="1">
+                <a:solidFill>
+                  <a:srgbClr val="DAFFDE"/>
+                </a:solidFill>
+              </a:rPr>
               <a:t>→ De oplossing: Verschuif de focus naar het inrichten en beheren van platform-engines (de gateways).</a:t>
             </a:r>
           </a:p>
@@ -13362,7 +13390,11 @@
               </a:lnSpc>
             </a:pPr>
             <a:r>
-              <a:rPr lang="nl-NL" b="1"/>
+              <a:rPr lang="nl-NL" b="1">
+                <a:solidFill>
+                  <a:srgbClr val="DAFFDE"/>
+                </a:solidFill>
+              </a:rPr>
               <a:t>→ Automatische controle: Regels centraal in de 'engine' afdwingen ontlast ontwikkelaars en behoudt grip.</a:t>
             </a:r>
           </a:p>
@@ -13444,7 +13476,7 @@
             <a:r>
               <a:rPr lang="en-US" sz="2850" b="1" i="0" u="none" strike="noStrike" cap="none">
                 <a:solidFill>
-                  <a:srgbClr val="DEFF9A"/>
+                  <a:srgbClr val="F5F5F5"/>
                 </a:solidFill>
                 <a:latin typeface="Urbanist"/>
                 <a:ea typeface="Urbanist"/>
@@ -13594,7 +13626,11 @@
               <a:buNone/>
             </a:pPr>
             <a:r>
-              <a:rPr lang="nl-NL" b="1"/>
+              <a:rPr lang="nl-NL" b="1">
+                <a:solidFill>
+                  <a:srgbClr val="DAFFDE"/>
+                </a:solidFill>
+              </a:rPr>
               <a:t>Annotaties sturen de router aan:</a:t>
             </a:r>
           </a:p>
@@ -13628,7 +13664,11 @@
               </a:lnSpc>
             </a:pPr>
             <a:r>
-              <a:rPr lang="nl-NL" b="1"/>
+              <a:rPr lang="nl-NL" b="1">
+                <a:solidFill>
+                  <a:srgbClr val="DAFFDE"/>
+                </a:solidFill>
+              </a:rPr>
               <a:t>→ De @mock annotatie: Backend-teams annoteren velden die nog niet zijn geïmplementeerd direct in het schema.</a:t>
             </a:r>
           </a:p>
@@ -13662,7 +13702,11 @@
               </a:lnSpc>
             </a:pPr>
             <a:r>
-              <a:rPr lang="nl-NL" b="1"/>
+              <a:rPr lang="nl-NL" b="1">
+                <a:solidFill>
+                  <a:srgbClr val="DAFFDE"/>
+                </a:solidFill>
+              </a:rPr>
               <a:t>→ AI-gegenereerd: De router interpreteert de annotatie en genereert realistische, domein-specifieke mockdata.</a:t>
             </a:r>
           </a:p>
@@ -13696,7 +13740,11 @@
               </a:lnSpc>
             </a:pPr>
             <a:r>
-              <a:rPr lang="nl-NL" b="1"/>
+              <a:rPr lang="nl-NL" b="1">
+                <a:solidFill>
+                  <a:srgbClr val="DAFFDE"/>
+                </a:solidFill>
+              </a:rPr>
               <a:t>→ Voorbeeld: `@mock(source: "llm" hint: "Amsterdam hotel")` levert direct betekenisvolle UI-vulling op.</a:t>
             </a:r>
           </a:p>
@@ -13802,7 +13850,7 @@
             <a:r>
               <a:rPr lang="en-US" sz="2850" b="1" i="0" u="none" strike="noStrike" cap="none" dirty="0">
                 <a:solidFill>
-                  <a:srgbClr val="DEFF9A"/>
+                  <a:srgbClr val="F5F5F5"/>
                 </a:solidFill>
                 <a:latin typeface="Urbanist"/>
                 <a:ea typeface="Urbanist"/>
@@ -13967,7 +14015,11 @@
               <a:buNone/>
             </a:pPr>
             <a:r>
-              <a:rPr lang="nl-NL" b="1"/>
+              <a:rPr lang="nl-NL" b="1">
+                <a:solidFill>
+                  <a:srgbClr val="DAFFDE"/>
+                </a:solidFill>
+              </a:rPr>
               <a:t>Alice Roquette (TomTom)</a:t>
             </a:r>
           </a:p>
@@ -14001,7 +14053,11 @@
               </a:lnSpc>
             </a:pPr>
             <a:r>
-              <a:rPr lang="nl-NL" b="1"/>
+              <a:rPr lang="nl-NL" b="1">
+                <a:solidFill>
+                  <a:srgbClr val="DAFFDE"/>
+                </a:solidFill>
+              </a:rPr>
               <a:t>→ Uitgebreide discussie over API-governance, gateways en complexe re-engineering binnen een platform-omgeving.</a:t>
             </a:r>
           </a:p>
@@ -14035,7 +14091,11 @@
               </a:lnSpc>
             </a:pPr>
             <a:r>
-              <a:rPr lang="nl-NL" b="1"/>
+              <a:rPr lang="nl-NL" b="1">
+                <a:solidFill>
+                  <a:srgbClr val="DAFFDE"/>
+                </a:solidFill>
+              </a:rPr>
               <a:t>→ Platform engineering is de lijm tussen de technische architectuur en de uiteindelijke developer experience.</a:t>
             </a:r>
           </a:p>
@@ -14069,7 +14129,11 @@
               </a:lnSpc>
             </a:pPr>
             <a:r>
-              <a:rPr lang="nl-NL" b="1"/>
+              <a:rPr lang="nl-NL" b="1">
+                <a:solidFill>
+                  <a:srgbClr val="DAFFDE"/>
+                </a:solidFill>
+              </a:rPr>
               <a:t>→ De DevOps AI Chatroom</a:t>
             </a:r>
           </a:p>
@@ -14103,7 +14167,11 @@
               </a:lnSpc>
             </a:pPr>
             <a:r>
-              <a:rPr lang="nl-NL" b="1"/>
+              <a:rPr lang="nl-NL" b="1">
+                <a:solidFill>
+                  <a:srgbClr val="DAFFDE"/>
+                </a:solidFill>
+              </a:rPr>
               <a:t>→ Een bijzonder initiatief van jonge engineers: een discord-chatroom waar teams samen AI-prompts sturen en de complete prompt-historie opslaan.</a:t>
             </a:r>
           </a:p>
@@ -14137,7 +14205,11 @@
               </a:lnSpc>
             </a:pPr>
             <a:r>
-              <a:rPr lang="nl-NL" b="1"/>
+              <a:rPr lang="nl-NL" b="1">
+                <a:solidFill>
+                  <a:srgbClr val="DAFFDE"/>
+                </a:solidFill>
+              </a:rPr>
               <a:t>→ Waarom: Dit herontdekt de "waarom" achter het ontwerp van systemen. De herontdekking van specs, maar dan organisch.</a:t>
             </a:r>
           </a:p>
@@ -14192,7 +14264,7 @@
             <a:r>
               <a:rPr lang="en-US" sz="2850" b="1" i="0" u="none" strike="noStrike" cap="none">
                 <a:solidFill>
-                  <a:srgbClr val="DEFF9A"/>
+                  <a:srgbClr val="F5F5F5"/>
                 </a:solidFill>
                 <a:latin typeface="Urbanist"/>
                 <a:ea typeface="Urbanist"/>
@@ -14314,7 +14386,7 @@
             <a:r>
               <a:rPr lang="en-US" sz="2850" b="1" i="0" u="none" strike="noStrike" cap="none">
                 <a:solidFill>
-                  <a:srgbClr val="DEFF9A"/>
+                  <a:srgbClr val="F5F5F5"/>
                 </a:solidFill>
                 <a:latin typeface="Urbanist"/>
                 <a:ea typeface="Urbanist"/>
@@ -14365,7 +14437,11 @@
               <a:buNone/>
             </a:pPr>
             <a:r>
-              <a:rPr lang="nl-NL" b="1"/>
+              <a:rPr lang="nl-NL" b="1">
+                <a:solidFill>
+                  <a:srgbClr val="DAFFDE"/>
+                </a:solidFill>
+              </a:rPr>
               <a:t>Lukasz Gornicki (AsyncAPI Maintainer):</a:t>
             </a:r>
           </a:p>
@@ -14399,7 +14475,11 @@
               </a:lnSpc>
             </a:pPr>
             <a:r>
-              <a:rPr lang="nl-NL" b="1"/>
+              <a:rPr lang="nl-NL" b="1">
+                <a:solidFill>
+                  <a:srgbClr val="DAFFDE"/>
+                </a:solidFill>
+              </a:rPr>
               <a:t>→ De Omhulling telt: Lukasz benadrukte dat het payload-schema zelf secundair is; AsyncAPI definieert de interactie en kanalen (Kafka, MQTT).</a:t>
             </a:r>
           </a:p>
@@ -14433,7 +14513,11 @@
               </a:lnSpc>
             </a:pPr>
             <a:r>
-              <a:rPr lang="nl-NL" b="1"/>
+              <a:rPr lang="nl-NL" b="1">
+                <a:solidFill>
+                  <a:srgbClr val="DAFFDE"/>
+                </a:solidFill>
+              </a:rPr>
               <a:t>→ Consistentie voor Events: Brengt dezelfde structuur en developer experience naar event-driven systemen als OpenAPI deed voor REST.</a:t>
             </a:r>
           </a:p>
@@ -14467,7 +14551,11 @@
               </a:lnSpc>
             </a:pPr>
             <a:r>
-              <a:rPr lang="nl-NL" b="1"/>
+              <a:rPr lang="nl-NL" b="1">
+                <a:solidFill>
+                  <a:srgbClr val="DAFFDE"/>
+                </a:solidFill>
+              </a:rPr>
               <a:t>→ Tooling Ecosysteem: Snelle groei in open-source code-generatoren en validatie-pipelines.</a:t>
             </a:r>
           </a:p>
@@ -14625,7 +14713,11 @@
               <a:buNone/>
             </a:pPr>
             <a:r>
-              <a:rPr lang="nl-NL" b="1"/>
+              <a:rPr lang="nl-NL" b="1">
+                <a:solidFill>
+                  <a:srgbClr val="DAFFDE"/>
+                </a:solidFill>
+              </a:rPr>
               <a:t>Interactieve AI assistent voor AsyncAPI:</a:t>
             </a:r>
           </a:p>
@@ -14659,7 +14751,11 @@
               </a:lnSpc>
             </a:pPr>
             <a:r>
-              <a:rPr lang="nl-NL" b="1"/>
+              <a:rPr lang="nl-NL" b="1">
+                <a:solidFill>
+                  <a:srgbClr val="DAFFDE"/>
+                </a:solidFill>
+              </a:rPr>
               <a:t>→ Laagdrempelig: Beantwoordt vragen over de specificatie, concepten en protocollen direct vanuit de officiële documentatie.</a:t>
             </a:r>
           </a:p>
@@ -14693,7 +14789,11 @@
               </a:lnSpc>
             </a:pPr>
             <a:r>
-              <a:rPr lang="nl-NL" b="1"/>
+              <a:rPr lang="nl-NL" b="1">
+                <a:solidFill>
+                  <a:srgbClr val="DAFFDE"/>
+                </a:solidFill>
+              </a:rPr>
               <a:t>→ Echte passie: "AsyncAPI is built by people with passion, not large corporate funding."</a:t>
             </a:r>
           </a:p>
@@ -14727,7 +14827,11 @@
               </a:lnSpc>
             </a:pPr>
             <a:r>
-              <a:rPr lang="nl-NL" b="1"/>
+              <a:rPr lang="nl-NL" b="1">
+                <a:solidFill>
+                  <a:srgbClr val="DAFFDE"/>
+                </a:solidFill>
+              </a:rPr>
               <a:t>→ Follow-up: Tevens kort met het GraphQL team gesproken en een vervolgafspraak ingepland om ervaringen uit te wisselen!</a:t>
             </a:r>
           </a:p>
@@ -14761,7 +14865,11 @@
               </a:lnSpc>
             </a:pPr>
             <a:r>
-              <a:rPr lang="nl-NL" b="1"/>
+              <a:rPr lang="nl-NL" b="1">
+                <a:solidFill>
+                  <a:srgbClr val="DAFFDE"/>
+                </a:solidFill>
+              </a:rPr>
               <a:t>→ askasyncapi.brainfart.dev</a:t>
             </a:r>
           </a:p>
@@ -14843,7 +14951,7 @@
             <a:r>
               <a:rPr lang="en-US" sz="2850" b="1" i="0" u="none" strike="noStrike" cap="none">
                 <a:solidFill>
-                  <a:srgbClr val="DEFF9A"/>
+                  <a:srgbClr val="F5F5F5"/>
                 </a:solidFill>
                 <a:latin typeface="Urbanist"/>
                 <a:ea typeface="Urbanist"/>
@@ -15034,7 +15142,7 @@
             <a:r>
               <a:rPr lang="en-US" sz="2850" b="0" i="0" u="none" strike="noStrike" cap="none">
                 <a:solidFill>
-                  <a:srgbClr val="DAFFDE"/>
+                  <a:srgbClr val="F5F5F5"/>
                 </a:solidFill>
                 <a:latin typeface="Urbanist Medium"/>
                 <a:ea typeface="Urbanist Medium"/>
@@ -15085,7 +15193,11 @@
               <a:buNone/>
             </a:pPr>
             <a:r>
-              <a:rPr lang="nl-NL" b="1"/>
+              <a:rPr lang="nl-NL" b="1">
+                <a:solidFill>
+                  <a:srgbClr val="DAFFDE"/>
+                </a:solidFill>
+              </a:rPr>
               <a:t>— Paneldiscussie met Mark Boyd, Erik Wilde, Kristen Womack &amp; Alice Roquette</a:t>
             </a:r>
           </a:p>
@@ -15131,7 +15243,7 @@
             <a:r>
               <a:rPr lang="en-US" sz="9000" b="0" i="0" u="none" strike="noStrike" cap="none">
                 <a:solidFill>
-                  <a:srgbClr val="DEFF9A"/>
+                  <a:srgbClr val="F5F5F5"/>
                 </a:solidFill>
                 <a:latin typeface="Urbanist Medium"/>
                 <a:ea typeface="Urbanist Medium"/>
@@ -15184,7 +15296,7 @@
             <a:r>
               <a:rPr lang="en-US" sz="9000" b="0" i="0" u="none" strike="noStrike" cap="none">
                 <a:solidFill>
-                  <a:srgbClr val="DEFF9A"/>
+                  <a:srgbClr val="F5F5F5"/>
                 </a:solidFill>
                 <a:latin typeface="Urbanist Medium"/>
                 <a:ea typeface="Urbanist Medium"/>
@@ -15246,7 +15358,7 @@
             <a:r>
               <a:rPr lang="en-US" sz="2850" b="1" i="0" u="none" strike="noStrike" cap="none">
                 <a:solidFill>
-                  <a:srgbClr val="DEFF9A"/>
+                  <a:srgbClr val="F5F5F5"/>
                 </a:solidFill>
                 <a:latin typeface="Urbanist"/>
                 <a:ea typeface="Urbanist"/>
@@ -15356,7 +15468,7 @@
             <a:r>
               <a:rPr lang="en-US" sz="1800" b="1" i="0" u="none" strike="noStrike" cap="none">
                 <a:solidFill>
-                  <a:srgbClr val="F5F5F5"/>
+                  <a:srgbClr val="DAFFDE"/>
                 </a:solidFill>
                 <a:latin typeface="Urbanist"/>
                 <a:ea typeface="Urbanist"/>
@@ -15368,7 +15480,7 @@
             <a:r>
               <a:rPr lang="en-US" sz="1800" b="1" i="0" u="none" strike="noStrike" cap="none">
                 <a:solidFill>
-                  <a:srgbClr val="DEFF9A"/>
+                  <a:srgbClr val="DAFFDE"/>
                 </a:solidFill>
                 <a:latin typeface="Urbanist"/>
                 <a:ea typeface="Urbanist"/>
@@ -15421,7 +15533,7 @@
             <a:r>
               <a:rPr lang="en-US" sz="1800" b="0" i="0" u="none" strike="noStrike" cap="none">
                 <a:solidFill>
-                  <a:srgbClr val="DEFF9A"/>
+                  <a:srgbClr val="DAFFDE"/>
                 </a:solidFill>
                 <a:latin typeface="Urbanist"/>
                 <a:ea typeface="Urbanist"/>
@@ -17546,7 +17658,11 @@
               <a:buNone/>
             </a:pPr>
             <a:r>
-              <a:rPr lang="nl-NL" b="1"/>
+              <a:rPr lang="nl-NL" b="1">
+                <a:solidFill>
+                  <a:srgbClr val="DAFFDE"/>
+                </a:solidFill>
+              </a:rPr>
               <a:t>Noodzaak voor een gateway/tussenlaag (KrakenD):</a:t>
             </a:r>
           </a:p>
@@ -17580,7 +17696,11 @@
               </a:lnSpc>
             </a:pPr>
             <a:r>
-              <a:rPr lang="nl-NL" b="1"/>
+              <a:rPr lang="nl-NL" b="1">
+                <a:solidFill>
+                  <a:srgbClr val="DAFFDE"/>
+                </a:solidFill>
+              </a:rPr>
               <a:t>→ Ontkoppeling: Transformeer payloads, pas rate-limiting toe en valideer autorisatie direct in de gateway-laag.</a:t>
             </a:r>
           </a:p>
@@ -17614,7 +17734,11 @@
               </a:lnSpc>
             </a:pPr>
             <a:r>
-              <a:rPr lang="nl-NL" b="1"/>
+              <a:rPr lang="nl-NL" b="1">
+                <a:solidFill>
+                  <a:srgbClr val="DAFFDE"/>
+                </a:solidFill>
+              </a:rPr>
               <a:t>→ KrakenD Open Source: Een krachtige engine om calls on-the-fly en direct in de gateway te manipuleren.</a:t>
             </a:r>
           </a:p>
@@ -17648,7 +17772,11 @@
               </a:lnSpc>
             </a:pPr>
             <a:r>
-              <a:rPr lang="nl-NL" b="1"/>
+              <a:rPr lang="nl-NL" b="1">
+                <a:solidFill>
+                  <a:srgbClr val="DAFFDE"/>
+                </a:solidFill>
+              </a:rPr>
               <a:t>→ Multi-Backend Aggregation: Voeg meerdere losse endpoints samen tot één beheersbaar en consistent interface.</a:t>
             </a:r>
           </a:p>
@@ -17730,7 +17858,7 @@
             <a:r>
               <a:rPr lang="en-US" sz="2850" b="1" i="0" u="none" strike="noStrike" cap="none">
                 <a:solidFill>
-                  <a:srgbClr val="DEFF9A"/>
+                  <a:srgbClr val="F5F5F5"/>
                 </a:solidFill>
                 <a:latin typeface="Urbanist"/>
                 <a:ea typeface="Urbanist"/>
@@ -17895,7 +18023,11 @@
               <a:buNone/>
             </a:pPr>
             <a:r>
-              <a:rPr lang="nl-NL" b="1"/>
+              <a:rPr lang="nl-NL" b="1">
+                <a:solidFill>
+                  <a:srgbClr val="DAFFDE"/>
+                </a:solidFill>
+              </a:rPr>
               <a:t>Het Goede Initiatief</a:t>
             </a:r>
           </a:p>
@@ -17929,7 +18061,11 @@
               </a:lnSpc>
             </a:pPr>
             <a:r>
-              <a:rPr lang="nl-NL" b="1"/>
+              <a:rPr lang="nl-NL" b="1">
+                <a:solidFill>
+                  <a:srgbClr val="DAFFDE"/>
+                </a:solidFill>
+              </a:rPr>
               <a:t>→ Dimitri van Hees (Geonovum) presenteerde een register om OpenAPI- en JSON-schema's centraal te ontsluiten voor de overheid.</a:t>
             </a:r>
           </a:p>
@@ -17963,7 +18099,11 @@
               </a:lnSpc>
             </a:pPr>
             <a:r>
-              <a:rPr lang="nl-NL" b="1"/>
+              <a:rPr lang="nl-NL" b="1">
+                <a:solidFill>
+                  <a:srgbClr val="DAFFDE"/>
+                </a:solidFill>
+              </a:rPr>
               <a:t>→ Dit stimuleert hergebruik en standaardisatie van dataspecificaties over overheidsgrenzen heen.</a:t>
             </a:r>
           </a:p>
@@ -17997,7 +18137,11 @@
               </a:lnSpc>
             </a:pPr>
             <a:r>
-              <a:rPr lang="nl-NL" b="1"/>
+              <a:rPr lang="nl-NL" b="1">
+                <a:solidFill>
+                  <a:srgbClr val="DAFFDE"/>
+                </a:solidFill>
+              </a:rPr>
               <a:t>→ Kritiek: De 'Grabbelton'</a:t>
             </a:r>
           </a:p>
@@ -18031,7 +18175,11 @@
               </a:lnSpc>
             </a:pPr>
             <a:r>
-              <a:rPr lang="nl-NL" b="1"/>
+              <a:rPr lang="nl-NL" b="1">
+                <a:solidFill>
+                  <a:srgbClr val="DAFFDE"/>
+                </a:solidFill>
+              </a:rPr>
               <a:t>→ Het register mist op dit moment nog een goede visuele representatie. Het voelt nu als een grote vergaarbak zonder heldere context.</a:t>
             </a:r>
           </a:p>
@@ -18065,7 +18213,11 @@
               </a:lnSpc>
             </a:pPr>
             <a:r>
-              <a:rPr lang="nl-NL" b="1"/>
+              <a:rPr lang="nl-NL" b="1">
+                <a:solidFill>
+                  <a:srgbClr val="DAFFDE"/>
+                </a:solidFill>
+              </a:rPr>
               <a:t>→ Een kans: Onze UML/objecttypen POC in React kan hier uitstekend bij helpen om semantisch begrip visueel te maken! Ik ga Dimitri benaderen.</a:t>
             </a:r>
           </a:p>
@@ -18120,7 +18272,7 @@
             <a:r>
               <a:rPr lang="en-US" sz="2850" b="1" i="0" u="none" strike="noStrike" cap="none">
                 <a:solidFill>
-                  <a:srgbClr val="DEFF9A"/>
+                  <a:srgbClr val="F5F5F5"/>
                 </a:solidFill>
                 <a:latin typeface="Urbanist"/>
                 <a:ea typeface="Urbanist"/>
@@ -18242,7 +18394,7 @@
             <a:r>
               <a:rPr lang="en-US" sz="2850" b="1" i="0" u="none" strike="noStrike" cap="none">
                 <a:solidFill>
-                  <a:srgbClr val="DEFF9A"/>
+                  <a:srgbClr val="F5F5F5"/>
                 </a:solidFill>
                 <a:latin typeface="Urbanist"/>
                 <a:ea typeface="Urbanist"/>
@@ -18293,7 +18445,11 @@
               <a:buNone/>
             </a:pPr>
             <a:r>
-              <a:rPr lang="nl-NL" b="1"/>
+              <a:rPr lang="nl-NL" b="1">
+                <a:solidFill>
+                  <a:srgbClr val="DAFFDE"/>
+                </a:solidFill>
+              </a:rPr>
               <a:t>Roberto Polli over de Italiaanse aanpak:</a:t>
             </a:r>
           </a:p>
@@ -18327,7 +18483,11 @@
               </a:lnSpc>
             </a:pPr>
             <a:r>
-              <a:rPr lang="nl-NL" b="1"/>
+              <a:rPr lang="nl-NL" b="1">
+                <a:solidFill>
+                  <a:srgbClr val="DAFFDE"/>
+                </a:solidFill>
+              </a:rPr>
               <a:t>→ Federatieve uitdaging: Italië heeft te maken met 20 autonome regio's en meer dan 8000 gemeenten met elk eigen regels.</a:t>
             </a:r>
           </a:p>
@@ -18361,7 +18521,11 @@
               </a:lnSpc>
             </a:pPr>
             <a:r>
-              <a:rPr lang="nl-NL" b="1"/>
+              <a:rPr lang="nl-NL" b="1">
+                <a:solidFill>
+                  <a:srgbClr val="DAFFDE"/>
+                </a:solidFill>
+              </a:rPr>
               <a:t>→ Sterk Mandaat: Sinds 2016 heeft het Digital Transformation Team de regie strak in handen genomen vanaf de premier.</a:t>
             </a:r>
           </a:p>
@@ -18395,7 +18559,11 @@
               </a:lnSpc>
             </a:pPr>
             <a:r>
-              <a:rPr lang="nl-NL" b="1"/>
+              <a:rPr lang="nl-NL" b="1">
+                <a:solidFill>
+                  <a:srgbClr val="DAFFDE"/>
+                </a:solidFill>
+              </a:rPr>
               <a:t>→ REST-Transitie: Volledige overstap van SOAP naar open standaarden en internetprotocollen voor interoperabiliteit.</a:t>
             </a:r>
           </a:p>
@@ -18553,7 +18721,11 @@
               <a:buNone/>
             </a:pPr>
             <a:r>
-              <a:rPr lang="nl-NL" b="1"/>
+              <a:rPr lang="nl-NL" b="1">
+                <a:solidFill>
+                  <a:srgbClr val="DAFFDE"/>
+                </a:solidFill>
+              </a:rPr>
               <a:t>Strategische successen en platforms:</a:t>
             </a:r>
           </a:p>
@@ -18587,7 +18759,11 @@
               </a:lnSpc>
             </a:pPr>
             <a:r>
-              <a:rPr lang="nl-NL" b="1"/>
+              <a:rPr lang="nl-NL" b="1">
+                <a:solidFill>
+                  <a:srgbClr val="DAFFDE"/>
+                </a:solidFill>
+              </a:rPr>
               <a:t>→ Nationale registers: Succesvolle integratie via de centrale API-catalogus (api.gov.it) en schema-register.</a:t>
             </a:r>
           </a:p>
@@ -18621,7 +18797,11 @@
               </a:lnSpc>
             </a:pPr>
             <a:r>
-              <a:rPr lang="nl-NL" b="1"/>
+              <a:rPr lang="nl-NL" b="1">
+                <a:solidFill>
+                  <a:srgbClr val="DAFFDE"/>
+                </a:solidFill>
+              </a:rPr>
               <a:t>→ Mensen &amp; wetten: Je hebt niet altijd harde wetgeving nodig... tenzij het niet anders kan. Zorg voor juridische expertise in je team.</a:t>
             </a:r>
           </a:p>
@@ -18655,7 +18835,11 @@
               </a:lnSpc>
             </a:pPr>
             <a:r>
-              <a:rPr lang="nl-NL" b="1"/>
+              <a:rPr lang="nl-NL" b="1">
+                <a:solidFill>
+                  <a:srgbClr val="DAFFDE"/>
+                </a:solidFill>
+              </a:rPr>
               <a:t>→ EIF Interoperabiliteit: Strikte naleving van de Europese interoperabiliteits-architectuur voorkomt technische omwegen.</a:t>
             </a:r>
           </a:p>
@@ -18737,7 +18921,7 @@
             <a:r>
               <a:rPr lang="en-US" sz="2850" b="1" i="0" u="none" strike="noStrike" cap="none">
                 <a:solidFill>
-                  <a:srgbClr val="DEFF9A"/>
+                  <a:srgbClr val="F5F5F5"/>
                 </a:solidFill>
                 <a:latin typeface="Urbanist"/>
                 <a:ea typeface="Urbanist"/>
@@ -18907,7 +19091,7 @@
             <a:r>
               <a:rPr lang="en-US" sz="4200" b="1" i="0" u="none" strike="noStrike" cap="none">
                 <a:solidFill>
-                  <a:srgbClr val="DEFF9A"/>
+                  <a:srgbClr val="F5F5F5"/>
                 </a:solidFill>
                 <a:latin typeface="Urbanist"/>
                 <a:ea typeface="Urbanist"/>
@@ -18958,7 +19142,11 @@
               <a:buNone/>
             </a:pPr>
             <a:r>
-              <a:rPr lang="nl-NL" b="1"/>
+              <a:rPr lang="nl-NL" b="1">
+                <a:solidFill>
+                  <a:srgbClr val="DAFFDE"/>
+                </a:solidFill>
+              </a:rPr>
               <a:t>Mythes ontmaskerd, integratie met LLM's en AI-powered mock-omgevingen.</a:t>
             </a:r>
           </a:p>
